--- a/library/seminars/sem-05/rendered/sem-05-deck-s50.pptx
+++ b/library/seminars/sem-05/rendered/sem-05-deck-s50.pptx
@@ -33269,7 +33269,7 @@
                 </a:solidFill>
                 <a:latin typeface="Arial"/>
               </a:rPr>
-              <a:t>ДОСТУП НАРУЖУ</a:t>
+              <a:t>ДОСТУП НАРУЖУ · ЗАВЯЗКА</a:t>
             </a:r>
           </a:p>
         </p:txBody>
@@ -40482,7 +40482,7 @@
                 </a:solidFill>
                 <a:latin typeface="Arial"/>
               </a:rPr>
-              <a:t>ДОСТУП НАРУЖУ</a:t>
+              <a:t>ДОСТУП НАРУЖУ · ПРОВАЛ</a:t>
             </a:r>
           </a:p>
         </p:txBody>
@@ -41164,7 +41164,7 @@
                 </a:solidFill>
                 <a:latin typeface="Arial"/>
               </a:rPr>
-              <a:t>ДОСТУП НАРУЖУ</a:t>
+              <a:t>ДОСТУП НАРУЖУ · ПРОВАЛ</a:t>
             </a:r>
           </a:p>
         </p:txBody>
